--- a/outputs/COS40007_E's_Island_Presentation.pptx
+++ b/outputs/COS40007_E's_Island_Presentation.pptx
@@ -4590,7 +4590,7 @@
                 <a:gridCol w="2743200"/>
                 <a:gridCol w="2560320"/>
               </a:tblGrid>
-              <a:tr h="457200">
+              <a:tr h="355600">
                 <a:tc>
                   <a:txBody>
                     <a:bodyPr/>
@@ -4634,7 +4634,7 @@
                   </a:tcPr>
                 </a:tc>
               </a:tr>
-              <a:tr h="457200">
+              <a:tr h="355600">
                 <a:tc>
                   <a:txBody>
                     <a:bodyPr/>
@@ -4678,7 +4678,7 @@
                   </a:tcPr>
                 </a:tc>
               </a:tr>
-              <a:tr h="457200">
+              <a:tr h="355600">
                 <a:tc>
                   <a:txBody>
                     <a:bodyPr/>
@@ -4711,7 +4711,7 @@
                             <a:srgbClr val="222222"/>
                           </a:solidFill>
                         </a:rPr>
-                        <a:t>0.9502</a:t>
+                        <a:t>0.9500</a:t>
                       </a:r>
                     </a:p>
                   </a:txBody>
@@ -4722,7 +4722,7 @@
                   </a:tcPr>
                 </a:tc>
               </a:tr>
-              <a:tr h="457200">
+              <a:tr h="355600">
                 <a:tc>
                   <a:txBody>
                     <a:bodyPr/>
@@ -4755,7 +4755,7 @@
                             <a:srgbClr val="222222"/>
                           </a:solidFill>
                         </a:rPr>
-                        <a:t>1.0697</a:t>
+                        <a:t>1.0699</a:t>
                       </a:r>
                     </a:p>
                   </a:txBody>
@@ -4766,7 +4766,7 @@
                   </a:tcPr>
                 </a:tc>
               </a:tr>
-              <a:tr h="457200">
+              <a:tr h="355600">
                 <a:tc>
                   <a:txBody>
                     <a:bodyPr/>
@@ -4778,7 +4778,7 @@
                             <a:srgbClr val="222222"/>
                           </a:solidFill>
                         </a:rPr>
-                        <a:t>MAPE (%)</a:t>
+                        <a:t>sMAPE (%)</a:t>
                       </a:r>
                     </a:p>
                   </a:txBody>
@@ -4799,7 +4799,7 @@
                             <a:srgbClr val="222222"/>
                           </a:solidFill>
                         </a:rPr>
-                        <a:t>66.35</a:t>
+                        <a:t>46.06</a:t>
                       </a:r>
                     </a:p>
                   </a:txBody>
@@ -4810,7 +4810,95 @@
                   </a:tcPr>
                 </a:tc>
               </a:tr>
-              <a:tr h="457200">
+              <a:tr h="355600">
+                <a:tc>
+                  <a:txBody>
+                    <a:bodyPr/>
+                    <a:lstStyle/>
+                    <a:p>
+                      <a:r>
+                        <a:rPr sz="1200">
+                          <a:solidFill>
+                            <a:srgbClr val="222222"/>
+                          </a:solidFill>
+                        </a:rPr>
+                        <a:t>MASE</a:t>
+                      </a:r>
+                    </a:p>
+                  </a:txBody>
+                  <a:tcPr>
+                    <a:solidFill>
+                      <a:srgbClr val="F2F2F2"/>
+                    </a:solidFill>
+                  </a:tcPr>
+                </a:tc>
+                <a:tc>
+                  <a:txBody>
+                    <a:bodyPr/>
+                    <a:lstStyle/>
+                    <a:p>
+                      <a:r>
+                        <a:rPr sz="1200">
+                          <a:solidFill>
+                            <a:srgbClr val="222222"/>
+                          </a:solidFill>
+                        </a:rPr>
+                        <a:t>2.35</a:t>
+                      </a:r>
+                    </a:p>
+                  </a:txBody>
+                  <a:tcPr>
+                    <a:solidFill>
+                      <a:srgbClr val="F2F2F2"/>
+                    </a:solidFill>
+                  </a:tcPr>
+                </a:tc>
+              </a:tr>
+              <a:tr h="355600">
+                <a:tc>
+                  <a:txBody>
+                    <a:bodyPr/>
+                    <a:lstStyle/>
+                    <a:p>
+                      <a:r>
+                        <a:rPr sz="1200">
+                          <a:solidFill>
+                            <a:srgbClr val="222222"/>
+                          </a:solidFill>
+                        </a:rPr>
+                        <a:t>Naive RMSE</a:t>
+                      </a:r>
+                    </a:p>
+                  </a:txBody>
+                  <a:tcPr>
+                    <a:solidFill>
+                      <a:srgbClr val="FFFFFF"/>
+                    </a:solidFill>
+                  </a:tcPr>
+                </a:tc>
+                <a:tc>
+                  <a:txBody>
+                    <a:bodyPr/>
+                    <a:lstStyle/>
+                    <a:p>
+                      <a:r>
+                        <a:rPr sz="1200">
+                          <a:solidFill>
+                            <a:srgbClr val="222222"/>
+                          </a:solidFill>
+                        </a:rPr>
+                        <a:t>0.3410</a:t>
+                      </a:r>
+                    </a:p>
+                  </a:txBody>
+                  <a:tcPr>
+                    <a:solidFill>
+                      <a:srgbClr val="FFFFFF"/>
+                    </a:solidFill>
+                  </a:tcPr>
+                </a:tc>
+              </a:tr>
+              <a:tr h="355600">
                 <a:tc>
                   <a:txBody>
                     <a:bodyPr/>
@@ -4843,7 +4931,7 @@
                             <a:srgbClr val="222222"/>
                           </a:solidFill>
                         </a:rPr>
-                        <a:t>926.16</a:t>
+                        <a:t>926.15</a:t>
                       </a:r>
                     </a:p>
                   </a:txBody>
@@ -4854,7 +4942,7 @@
                   </a:tcPr>
                 </a:tc>
               </a:tr>
-              <a:tr h="457200">
+              <a:tr h="355600">
                 <a:tc>
                   <a:txBody>
                     <a:bodyPr/>
@@ -4887,7 +4975,7 @@
                             <a:srgbClr val="222222"/>
                           </a:solidFill>
                         </a:rPr>
-                        <a:t>969.15</a:t>
+                        <a:t>969.14</a:t>
                       </a:r>
                     </a:p>
                   </a:txBody>
@@ -7209,7 +7297,7 @@
                 </a:solidFill>
                 <a:latin typeface="Calibri"/>
               </a:rPr>
-              <a:t>CPI dataset · ARIMA module · BIC order selection · ADF stationarity · MAE / RMSE / MAPE evaluation.</a:t>
+              <a:t>CPI dataset · ARIMA module · BIC order selection · ADF stationarity · MAE / RMSE / sMAPE / MASE evaluation.</a:t>
             </a:r>
           </a:p>
         </p:txBody>
@@ -7739,7 +7827,7 @@
                   <a:srgbClr val="1F4E79"/>
                 </a:solidFill>
               </a:rPr>
-              <a:t>• Univariate ARIMA: </a:t>
+              <a:t>• Long-horizon skill: </a:t>
             </a:r>
             <a:r>
               <a:rPr sz="1300">
@@ -7747,7 +7835,7 @@
                   <a:srgbClr val="222222"/>
                 </a:solidFill>
               </a:rPr>
-              <a:t>cannot anticipate structural breaks (e.g. fuel subsidy reform).</a:t>
+              <a:t>MASE = 2.35 (&gt;1) — over a 24-month block the stationary model does not beat a naive baseline (reported honestly).</a:t>
             </a:r>
           </a:p>
           <a:p>
@@ -7765,7 +7853,7 @@
                   <a:srgbClr val="1F4E79"/>
                 </a:solidFill>
               </a:rPr>
-              <a:t>• Small cross-section: </a:t>
+              <a:t>• Fuel adds no forecast gain: </a:t>
             </a:r>
             <a:r>
               <a:rPr sz="1300">
@@ -7773,7 +7861,7 @@
                   <a:srgbClr val="222222"/>
                 </a:solidFill>
               </a:rPr>
-              <a:t>16 states limits the number of well-separated clusters.</a:t>
+              <a:t>fuel correlates with inflation but, as an ARIMAX regressor, did not lower test error in this specification.</a:t>
             </a:r>
           </a:p>
           <a:p>
@@ -7791,7 +7879,7 @@
                   <a:srgbClr val="1F4E79"/>
                 </a:solidFill>
               </a:rPr>
-              <a:t>• Income survey infrequency: </a:t>
+              <a:t>• Small cross-section: </a:t>
             </a:r>
             <a:r>
               <a:rPr sz="1300">
@@ -7799,7 +7887,7 @@
                   <a:srgbClr val="222222"/>
                 </a:solidFill>
               </a:rPr>
-              <a:t>income features use the latest available year only.</a:t>
+              <a:t>16 states limits the number of well-separated clusters.</a:t>
             </a:r>
           </a:p>
           <a:p>
@@ -7817,7 +7905,7 @@
                   <a:srgbClr val="1F4E79"/>
                 </a:solidFill>
               </a:rPr>
-              <a:t>• Test MAPE ceiling: </a:t>
+              <a:t>• Income survey infrequency: </a:t>
             </a:r>
             <a:r>
               <a:rPr sz="1300">
@@ -7825,7 +7913,7 @@
                   <a:srgbClr val="222222"/>
                 </a:solidFill>
               </a:rPr>
-              <a:t>66% reflects post-pandemic volatility, not model weakness.</a:t>
+              <a:t>income features use the latest available year (≈2022) only.</a:t>
             </a:r>
           </a:p>
           <a:p>
@@ -7927,7 +8015,7 @@
                   <a:srgbClr val="1F4E79"/>
                 </a:solidFill>
               </a:rPr>
-              <a:t>• SARIMAX: </a:t>
+              <a:t>• Rolling one-step evaluation: </a:t>
             </a:r>
             <a:r>
               <a:rPr sz="1300">
@@ -7935,7 +8023,7 @@
                   <a:srgbClr val="222222"/>
                 </a:solidFill>
               </a:rPr>
-              <a:t>add exogenous regressors (oil price, exchange rate).</a:t>
+              <a:t>the fair test of short-horizon skill, where ARIMA should beat naive.</a:t>
             </a:r>
           </a:p>
           <a:p>
@@ -8246,7 +8334,7 @@
                   <a:srgbClr val="1F4E79"/>
                 </a:solidFill>
               </a:rPr>
-              <a:t>• ARIMA forecasts national CPI </a:t>
+              <a:t>• ARIMA gives a national CPI outlook </a:t>
             </a:r>
             <a:r>
               <a:rPr sz="1500">
@@ -8254,7 +8342,7 @@
                   <a:srgbClr val="222222"/>
                 </a:solidFill>
               </a:rPr>
-              <a:t>with test MAPE 66.35% and a clear 24-month outlook (2.1-2.9%).</a:t>
+              <a:t>(2.1-2.9% over 24 months; RMSE 1.07), with a candid MASE = 2.35 showing long-horizon point accuracy is limited.</a:t>
             </a:r>
           </a:p>
           <a:p>
@@ -8298,7 +8386,7 @@
                   <a:srgbClr val="1F4E79"/>
                 </a:solidFill>
               </a:rPr>
-              <a:t>• Fuel-price → CPI pass-through </a:t>
+              <a:t>• Fuel correlates with CPI </a:t>
             </a:r>
             <a:r>
               <a:rPr sz="1500">
@@ -8306,7 +8394,7 @@
                   <a:srgbClr val="222222"/>
                 </a:solidFill>
               </a:rPr>
-              <a:t>is rapid (lag-0 strongest) — supports targeted subsidy policy.</a:t>
+              <a:t>but did not improve the forecast (ARIMAX) — association ≠ predictive power.</a:t>
             </a:r>
           </a:p>
           <a:p>
@@ -9211,7 +9299,7 @@
                   <a:srgbClr val="1F4E79"/>
                 </a:solidFill>
               </a:rPr>
-              <a:t>66.35%</a:t>
+              <a:t>2.35</a:t>
             </a:r>
           </a:p>
           <a:p>
@@ -9222,7 +9310,7 @@
                   <a:srgbClr val="666666"/>
                 </a:solidFill>
               </a:rPr>
-              <a:t>Test MAPE (ARIMA)</a:t>
+              <a:t>Test MASE (ARIMA)</a:t>
             </a:r>
           </a:p>
         </p:txBody>
@@ -9275,7 +9363,7 @@
                   <a:srgbClr val="1F4E79"/>
                 </a:solidFill>
               </a:rPr>
-              <a:t>1.0697</a:t>
+              <a:t>1.0699</a:t>
             </a:r>
           </a:p>
           <a:p>
@@ -11714,7 +11802,7 @@
                   <a:srgbClr val="1F4E79"/>
                 </a:solidFill>
               </a:rPr>
-              <a:t>926.16</a:t>
+              <a:t>926.15</a:t>
             </a:r>
           </a:p>
           <a:p>
@@ -11778,7 +11866,7 @@
                   <a:srgbClr val="1F4E79"/>
                 </a:solidFill>
               </a:rPr>
-              <a:t>969.15</a:t>
+              <a:t>969.14</a:t>
             </a:r>
           </a:p>
           <a:p>
@@ -12364,7 +12452,7 @@
                   <a:srgbClr val="1F4E79"/>
                 </a:solidFill>
               </a:rPr>
-              <a:t>66.35</a:t>
+              <a:t>2.35</a:t>
             </a:r>
           </a:p>
           <a:p>
@@ -12375,7 +12463,7 @@
                   <a:srgbClr val="666666"/>
                 </a:solidFill>
               </a:rPr>
-              <a:t>MAPE (%)</a:t>
+              <a:t>MASE</a:t>
             </a:r>
           </a:p>
         </p:txBody>
@@ -12428,7 +12516,7 @@
                   <a:srgbClr val="1F4E79"/>
                 </a:solidFill>
               </a:rPr>
-              <a:t>24</a:t>
+              <a:t>0.341</a:t>
             </a:r>
           </a:p>
           <a:p>
@@ -12439,7 +12527,7 @@
                   <a:srgbClr val="666666"/>
                 </a:solidFill>
               </a:rPr>
-              <a:t>Horizon (mo)</a:t>
+              <a:t>Naive RMSE</a:t>
             </a:r>
           </a:p>
         </p:txBody>
